--- a/07-participatory-budgeting/slides-1-budget-discrete.pptx
+++ b/07-participatory-budgeting/slides-1-budget-discrete.pptx
@@ -20,11 +20,12 @@
     <p:sldId id="268" r:id="rId14"/>
     <p:sldId id="269" r:id="rId15"/>
     <p:sldId id="270" r:id="rId16"/>
-    <p:sldId id="271" r:id="rId17"/>
-    <p:sldId id="272" r:id="rId18"/>
-    <p:sldId id="273" r:id="rId19"/>
-    <p:sldId id="275" r:id="rId20"/>
-    <p:sldId id="276" r:id="rId21"/>
+    <p:sldId id="277" r:id="rId17"/>
+    <p:sldId id="271" r:id="rId18"/>
+    <p:sldId id="272" r:id="rId19"/>
+    <p:sldId id="273" r:id="rId20"/>
+    <p:sldId id="275" r:id="rId21"/>
+    <p:sldId id="276" r:id="rId22"/>
   </p:sldIdLst>
   <p:sldSz cx="9144000" cy="6858000" type="screen4x3"/>
   <p:notesSz cx="6858000" cy="9144000"/>
@@ -262,7 +263,7 @@
           <a:p>
             <a:fld id="{DC548CFC-330B-4E13-8594-C7215081A49A}" type="datetimeFigureOut">
               <a:rPr lang="en-US" smtClean="0"/>
-              <a:t>6/8/2025</a:t>
+              <a:t>12/8/2025</a:t>
             </a:fld>
             <a:endParaRPr lang="en-US"/>
           </a:p>
@@ -432,7 +433,7 @@
           <a:p>
             <a:fld id="{DC548CFC-330B-4E13-8594-C7215081A49A}" type="datetimeFigureOut">
               <a:rPr lang="en-US" smtClean="0"/>
-              <a:t>6/8/2025</a:t>
+              <a:t>12/8/2025</a:t>
             </a:fld>
             <a:endParaRPr lang="en-US"/>
           </a:p>
@@ -612,7 +613,7 @@
           <a:p>
             <a:fld id="{DC548CFC-330B-4E13-8594-C7215081A49A}" type="datetimeFigureOut">
               <a:rPr lang="en-US" smtClean="0"/>
-              <a:t>6/8/2025</a:t>
+              <a:t>12/8/2025</a:t>
             </a:fld>
             <a:endParaRPr lang="en-US"/>
           </a:p>
@@ -782,7 +783,7 @@
           <a:p>
             <a:fld id="{DC548CFC-330B-4E13-8594-C7215081A49A}" type="datetimeFigureOut">
               <a:rPr lang="en-US" smtClean="0"/>
-              <a:t>6/8/2025</a:t>
+              <a:t>12/8/2025</a:t>
             </a:fld>
             <a:endParaRPr lang="en-US"/>
           </a:p>
@@ -1026,7 +1027,7 @@
           <a:p>
             <a:fld id="{DC548CFC-330B-4E13-8594-C7215081A49A}" type="datetimeFigureOut">
               <a:rPr lang="en-US" smtClean="0"/>
-              <a:t>6/8/2025</a:t>
+              <a:t>12/8/2025</a:t>
             </a:fld>
             <a:endParaRPr lang="en-US"/>
           </a:p>
@@ -1258,7 +1259,7 @@
           <a:p>
             <a:fld id="{DC548CFC-330B-4E13-8594-C7215081A49A}" type="datetimeFigureOut">
               <a:rPr lang="en-US" smtClean="0"/>
-              <a:t>6/8/2025</a:t>
+              <a:t>12/8/2025</a:t>
             </a:fld>
             <a:endParaRPr lang="en-US"/>
           </a:p>
@@ -1625,7 +1626,7 @@
           <a:p>
             <a:fld id="{DC548CFC-330B-4E13-8594-C7215081A49A}" type="datetimeFigureOut">
               <a:rPr lang="en-US" smtClean="0"/>
-              <a:t>6/8/2025</a:t>
+              <a:t>12/8/2025</a:t>
             </a:fld>
             <a:endParaRPr lang="en-US"/>
           </a:p>
@@ -1743,7 +1744,7 @@
           <a:p>
             <a:fld id="{DC548CFC-330B-4E13-8594-C7215081A49A}" type="datetimeFigureOut">
               <a:rPr lang="en-US" smtClean="0"/>
-              <a:t>6/8/2025</a:t>
+              <a:t>12/8/2025</a:t>
             </a:fld>
             <a:endParaRPr lang="en-US"/>
           </a:p>
@@ -1838,7 +1839,7 @@
           <a:p>
             <a:fld id="{DC548CFC-330B-4E13-8594-C7215081A49A}" type="datetimeFigureOut">
               <a:rPr lang="en-US" smtClean="0"/>
-              <a:t>6/8/2025</a:t>
+              <a:t>12/8/2025</a:t>
             </a:fld>
             <a:endParaRPr lang="en-US"/>
           </a:p>
@@ -2115,7 +2116,7 @@
           <a:p>
             <a:fld id="{DC548CFC-330B-4E13-8594-C7215081A49A}" type="datetimeFigureOut">
               <a:rPr lang="en-US" smtClean="0"/>
-              <a:t>6/8/2025</a:t>
+              <a:t>12/8/2025</a:t>
             </a:fld>
             <a:endParaRPr lang="en-US"/>
           </a:p>
@@ -2372,7 +2373,7 @@
           <a:p>
             <a:fld id="{DC548CFC-330B-4E13-8594-C7215081A49A}" type="datetimeFigureOut">
               <a:rPr lang="en-US" smtClean="0"/>
-              <a:t>6/8/2025</a:t>
+              <a:t>12/8/2025</a:t>
             </a:fld>
             <a:endParaRPr lang="en-US"/>
           </a:p>
@@ -2585,7 +2586,7 @@
           <a:p>
             <a:fld id="{DC548CFC-330B-4E13-8594-C7215081A49A}" type="datetimeFigureOut">
               <a:rPr lang="en-US" smtClean="0"/>
-              <a:t>6/8/2025</a:t>
+              <a:t>12/8/2025</a:t>
             </a:fld>
             <a:endParaRPr lang="en-US"/>
           </a:p>
@@ -5313,7 +5314,24 @@
                   <a:srgbClr val="7030A0"/>
                 </a:solidFill>
               </a:rPr>
-              <a:t>שיטת פראגמן בוחרת לוועדה את ג1, ..., ג12 (חישוב ארוך..)</a:t>
+              <a:t>שיטת פראגמן בוחרת לוועדה את ג1, ..., ג12 (</a:t>
+            </a:r>
+            <a:r>
+              <a:rPr lang="he-IL" sz="2400">
+                <a:solidFill>
+                  <a:srgbClr val="7030A0"/>
+                </a:solidFill>
+                <a:hlinkClick r:id="rId2"/>
+              </a:rPr>
+              <a:t>ראו חישוב כאן</a:t>
+            </a:r>
+            <a:r>
+              <a:rPr lang="he-IL" sz="2400">
+                <a:solidFill>
+                  <a:srgbClr val="7030A0"/>
+                </a:solidFill>
+              </a:rPr>
+              <a:t>)</a:t>
             </a:r>
           </a:p>
           <a:p>
@@ -5345,6 +5363,322 @@
 </file>
 
 <file path=ppt/slides/slide16.xml><?xml version="1.0" encoding="utf-8"?>
+<p:sld xmlns:a="http://schemas.openxmlformats.org/drawingml/2006/main" xmlns:r="http://schemas.openxmlformats.org/officeDocument/2006/relationships" xmlns:p="http://schemas.openxmlformats.org/presentationml/2006/main">
+  <p:cSld>
+    <p:spTree>
+      <p:nvGrpSpPr>
+        <p:cNvPr id="1" name="">
+          <a:extLst>
+            <a:ext uri="{FF2B5EF4-FFF2-40B4-BE49-F238E27FC236}">
+              <a16:creationId xmlns:a16="http://schemas.microsoft.com/office/drawing/2014/main" id="{ADF72290-AA18-2B29-37F5-A040A31C6FFF}"/>
+            </a:ext>
+          </a:extLst>
+        </p:cNvPr>
+        <p:cNvGrpSpPr/>
+        <p:nvPr/>
+      </p:nvGrpSpPr>
+      <p:grpSpPr>
+        <a:xfrm>
+          <a:off x="0" y="0"/>
+          <a:ext cx="0" cy="0"/>
+          <a:chOff x="0" y="0"/>
+          <a:chExt cx="0" cy="0"/>
+        </a:xfrm>
+      </p:grpSpPr>
+      <p:sp>
+        <p:nvSpPr>
+          <p:cNvPr id="2" name="Title 1">
+            <a:extLst>
+              <a:ext uri="{FF2B5EF4-FFF2-40B4-BE49-F238E27FC236}">
+                <a16:creationId xmlns:a16="http://schemas.microsoft.com/office/drawing/2014/main" id="{8180F700-C83C-16E8-FFFF-044926033797}"/>
+              </a:ext>
+            </a:extLst>
+          </p:cNvPr>
+          <p:cNvSpPr>
+            <a:spLocks noGrp="1"/>
+          </p:cNvSpPr>
+          <p:nvPr>
+            <p:ph type="title"/>
+          </p:nvPr>
+        </p:nvSpPr>
+        <p:spPr>
+          <a:xfrm>
+            <a:off x="628650" y="203530"/>
+            <a:ext cx="7886700" cy="612336"/>
+          </a:xfrm>
+        </p:spPr>
+        <p:txBody>
+          <a:bodyPr>
+            <a:normAutofit fontScale="90000"/>
+          </a:bodyPr>
+          <a:lstStyle/>
+          <a:p>
+            <a:pPr algn="ctr" rtl="1"/>
+            <a:r>
+              <a:rPr lang="he-IL"/>
+              <a:t>שיטת פראגמן – ייצוג הוגן מורחב</a:t>
+            </a:r>
+            <a:endParaRPr lang="en-US" b="1"/>
+          </a:p>
+        </p:txBody>
+      </p:sp>
+      <p:sp>
+        <p:nvSpPr>
+          <p:cNvPr id="7" name="Content Placeholder 2">
+            <a:extLst>
+              <a:ext uri="{FF2B5EF4-FFF2-40B4-BE49-F238E27FC236}">
+                <a16:creationId xmlns:a16="http://schemas.microsoft.com/office/drawing/2014/main" id="{5EF5FC1A-74C7-9710-53CA-D134B6F038C8}"/>
+              </a:ext>
+            </a:extLst>
+          </p:cNvPr>
+          <p:cNvSpPr>
+            <a:spLocks noGrp="1"/>
+          </p:cNvSpPr>
+          <p:nvPr>
+            <p:ph idx="1"/>
+          </p:nvPr>
+        </p:nvSpPr>
+        <p:spPr>
+          <a:xfrm>
+            <a:off x="372461" y="997935"/>
+            <a:ext cx="8399078" cy="5308273"/>
+          </a:xfrm>
+        </p:spPr>
+        <p:txBody>
+          <a:bodyPr>
+            <a:noAutofit/>
+          </a:bodyPr>
+          <a:lstStyle/>
+          <a:p>
+            <a:pPr marL="0" indent="0" algn="r" rtl="1">
+              <a:buNone/>
+            </a:pPr>
+            <a:r>
+              <a:rPr lang="he-IL" sz="2400"/>
+              <a:t>נבחר ג3. יתרות:</a:t>
+            </a:r>
+            <a:r>
+              <a:rPr lang="en-US" sz="2400"/>
+              <a:t> </a:t>
+            </a:r>
+            <a:r>
+              <a:rPr lang="he-IL" sz="2400"/>
+              <a:t>0.05, 0.05, 0, 0, 0.</a:t>
+            </a:r>
+          </a:p>
+          <a:p>
+            <a:pPr marL="0" indent="0" algn="r" rtl="1">
+              <a:buNone/>
+            </a:pPr>
+            <a:r>
+              <a:rPr lang="he-IL" sz="2400"/>
+              <a:t>נבחר ג4. יתרות:</a:t>
+            </a:r>
+            <a:r>
+              <a:rPr lang="en-US" sz="2400"/>
+              <a:t> </a:t>
+            </a:r>
+            <a:r>
+              <a:rPr lang="he-IL" sz="2400"/>
+              <a:t>0.1, 0.1, 0, 0, 0.</a:t>
+            </a:r>
+          </a:p>
+          <a:p>
+            <a:pPr marL="0" indent="0" algn="r" rtl="1">
+              <a:buNone/>
+            </a:pPr>
+            <a:r>
+              <a:rPr lang="he-IL" sz="2400"/>
+              <a:t>נבחר ג5. יתרות:</a:t>
+            </a:r>
+            <a:r>
+              <a:rPr lang="en-US" sz="2400"/>
+              <a:t> </a:t>
+            </a:r>
+            <a:r>
+              <a:rPr lang="he-IL" sz="2400"/>
+              <a:t>0.15, 0.15, 0, 0, 0.</a:t>
+            </a:r>
+          </a:p>
+          <a:p>
+            <a:pPr marL="0" indent="0" algn="r" rtl="1">
+              <a:buNone/>
+            </a:pPr>
+            <a:r>
+              <a:rPr lang="he-IL" sz="2400"/>
+              <a:t>נבחר ג6. יתרות:</a:t>
+            </a:r>
+            <a:r>
+              <a:rPr lang="en-US" sz="2400"/>
+              <a:t> </a:t>
+            </a:r>
+            <a:r>
+              <a:rPr lang="he-IL" sz="2400"/>
+              <a:t>0.2, 0.2, 0, 0, 0.</a:t>
+            </a:r>
+          </a:p>
+          <a:p>
+            <a:pPr marL="0" indent="0" algn="r" rtl="1">
+              <a:buNone/>
+            </a:pPr>
+            <a:r>
+              <a:rPr lang="he-IL" sz="2400"/>
+              <a:t>נבחר ג2. יתרות:</a:t>
+            </a:r>
+            <a:r>
+              <a:rPr lang="en-US" sz="2400"/>
+              <a:t> </a:t>
+            </a:r>
+            <a:r>
+              <a:rPr lang="he-IL" sz="2400"/>
+              <a:t>0.246, 0, 0, 0, 0.046.</a:t>
+            </a:r>
+          </a:p>
+          <a:p>
+            <a:pPr marL="0" indent="0" algn="r" rtl="1">
+              <a:buNone/>
+            </a:pPr>
+            <a:r>
+              <a:rPr lang="he-IL" sz="2400"/>
+              <a:t>נבחר ג7. יתרות:</a:t>
+            </a:r>
+            <a:r>
+              <a:rPr lang="en-US" sz="2400"/>
+              <a:t> </a:t>
+            </a:r>
+            <a:r>
+              <a:rPr lang="he-IL" sz="2400"/>
+              <a:t>0.275, 0.029, 0, 0, 0.</a:t>
+            </a:r>
+          </a:p>
+          <a:p>
+            <a:pPr marL="0" indent="0" algn="r" rtl="1">
+              <a:buNone/>
+            </a:pPr>
+            <a:r>
+              <a:rPr lang="he-IL" sz="2400"/>
+              <a:t>נבחר ג8. יתרות:</a:t>
+            </a:r>
+            <a:r>
+              <a:rPr lang="en-US" sz="2400"/>
+              <a:t> </a:t>
+            </a:r>
+            <a:r>
+              <a:rPr lang="he-IL" sz="2400"/>
+              <a:t>0.325, 0.079, 0, 0, 0.</a:t>
+            </a:r>
+          </a:p>
+          <a:p>
+            <a:pPr marL="0" indent="0" algn="r" rtl="1">
+              <a:buNone/>
+            </a:pPr>
+            <a:r>
+              <a:rPr lang="he-IL" sz="2400"/>
+              <a:t>נבחר ג1. יתרות:</a:t>
+            </a:r>
+            <a:r>
+              <a:rPr lang="en-US" sz="2400"/>
+              <a:t> </a:t>
+            </a:r>
+            <a:r>
+              <a:rPr lang="he-IL" sz="2400"/>
+              <a:t>0, 0.123, 0, 0.044, 0.044.</a:t>
+            </a:r>
+          </a:p>
+          <a:p>
+            <a:pPr marL="0" indent="0" algn="r" rtl="1">
+              <a:buNone/>
+            </a:pPr>
+            <a:r>
+              <a:rPr lang="he-IL" sz="2400"/>
+              <a:t>נבחר ג9. יתרות:</a:t>
+            </a:r>
+            <a:r>
+              <a:rPr lang="en-US" sz="2400"/>
+              <a:t> </a:t>
+            </a:r>
+            <a:r>
+              <a:rPr lang="he-IL" sz="2400"/>
+              <a:t>0.019, 0.142, 0, 0, 0.</a:t>
+            </a:r>
+          </a:p>
+          <a:p>
+            <a:pPr marL="0" indent="0" algn="r" rtl="1">
+              <a:buNone/>
+            </a:pPr>
+            <a:r>
+              <a:rPr lang="he-IL" sz="2400"/>
+              <a:t>נבחר ג10. יתרות:</a:t>
+            </a:r>
+            <a:r>
+              <a:rPr lang="en-US" sz="2400"/>
+              <a:t> </a:t>
+            </a:r>
+            <a:r>
+              <a:rPr lang="he-IL" sz="2400"/>
+              <a:t>0.069, 0.192, 0, 0, 0.</a:t>
+            </a:r>
+          </a:p>
+          <a:p>
+            <a:pPr marL="0" indent="0" algn="r" rtl="1">
+              <a:buNone/>
+            </a:pPr>
+            <a:r>
+              <a:rPr lang="he-IL" sz="2400"/>
+              <a:t>נבחר ג11. יתרות:</a:t>
+            </a:r>
+            <a:r>
+              <a:rPr lang="en-US" sz="2400"/>
+              <a:t> </a:t>
+            </a:r>
+            <a:r>
+              <a:rPr lang="he-IL" sz="2400"/>
+              <a:t>0.119, 0.242, 0, 0, 0.</a:t>
+            </a:r>
+          </a:p>
+          <a:p>
+            <a:pPr marL="0" indent="0" algn="r" rtl="1">
+              <a:buNone/>
+            </a:pPr>
+            <a:r>
+              <a:rPr lang="he-IL" sz="2400"/>
+              <a:t>נבחר ג12. יתרות:</a:t>
+            </a:r>
+            <a:r>
+              <a:rPr lang="en-US" sz="2400"/>
+              <a:t> </a:t>
+            </a:r>
+            <a:r>
+              <a:rPr lang="he-IL" sz="2400"/>
+              <a:t>0.169, 0.292, 0, 0, 0.</a:t>
+            </a:r>
+          </a:p>
+          <a:p>
+            <a:pPr marL="0" indent="0" algn="r" rtl="1">
+              <a:buNone/>
+            </a:pPr>
+            <a:endParaRPr lang="he-IL" sz="2400">
+              <a:solidFill>
+                <a:srgbClr val="FF0000"/>
+              </a:solidFill>
+            </a:endParaRPr>
+          </a:p>
+        </p:txBody>
+      </p:sp>
+    </p:spTree>
+    <p:extLst>
+      <p:ext uri="{BB962C8B-B14F-4D97-AF65-F5344CB8AC3E}">
+        <p14:creationId xmlns:p14="http://schemas.microsoft.com/office/powerpoint/2010/main" val="3390086048"/>
+      </p:ext>
+    </p:extLst>
+  </p:cSld>
+  <p:clrMapOvr>
+    <a:masterClrMapping/>
+  </p:clrMapOvr>
+</p:sld>
+</file>
+
+<file path=ppt/slides/slide17.xml><?xml version="1.0" encoding="utf-8"?>
 <p:sld xmlns:a="http://schemas.openxmlformats.org/drawingml/2006/main" xmlns:r="http://schemas.openxmlformats.org/officeDocument/2006/relationships" xmlns:p="http://schemas.openxmlformats.org/presentationml/2006/main">
   <p:cSld>
     <p:spTree>
@@ -5682,7 +6016,7 @@
 </p:sld>
 </file>
 
-<file path=ppt/slides/slide17.xml><?xml version="1.0" encoding="utf-8"?>
+<file path=ppt/slides/slide18.xml><?xml version="1.0" encoding="utf-8"?>
 <p:sld xmlns:a="http://schemas.openxmlformats.org/drawingml/2006/main" xmlns:r="http://schemas.openxmlformats.org/officeDocument/2006/relationships" xmlns:p="http://schemas.openxmlformats.org/presentationml/2006/main">
   <p:cSld>
     <p:spTree>
@@ -6133,7 +6467,53 @@
                 <a:ea typeface="Calibri" panose="020F0502020204030204" pitchFamily="34" charset="0"/>
                 <a:cs typeface="David" panose="020E0502060401010101" pitchFamily="34" charset="-79"/>
               </a:rPr>
-              <a:t> מועמדים לכל היותר, ולכן נשאר להם ביחד לפחות 1. לכן הם יכולים לממן מועמד נוסף.</a:t>
+              <a:t> מועמדים לכל היותר </a:t>
+            </a:r>
+            <a:r>
+              <a:rPr lang="he-IL" sz="2000">
+                <a:solidFill>
+                  <a:srgbClr val="00B050"/>
+                </a:solidFill>
+                <a:effectLst/>
+                <a:latin typeface="David" panose="020E0502060401010101" pitchFamily="34" charset="-79"/>
+                <a:ea typeface="Calibri" panose="020F0502020204030204" pitchFamily="34" charset="0"/>
+                <a:cs typeface="David" panose="020E0502060401010101" pitchFamily="34" charset="-79"/>
+              </a:rPr>
+              <a:t>(* ייתכן שכל מקופח שילם סכום שונה, אבל כולם ביחד שילמו לכל היותר </a:t>
+            </a:r>
+            <a:r>
+              <a:rPr lang="en-US" sz="2000">
+                <a:solidFill>
+                  <a:srgbClr val="00B050"/>
+                </a:solidFill>
+                <a:latin typeface="David" panose="020E0502060401010101" pitchFamily="34" charset="-79"/>
+                <a:ea typeface="Calibri" panose="020F0502020204030204" pitchFamily="34" charset="0"/>
+                <a:cs typeface="David" panose="020E0502060401010101" pitchFamily="34" charset="-79"/>
+              </a:rPr>
+              <a:t>L-1</a:t>
+            </a:r>
+            <a:r>
+              <a:rPr lang="he-IL" sz="2000">
+                <a:solidFill>
+                  <a:srgbClr val="00B050"/>
+                </a:solidFill>
+                <a:latin typeface="David" panose="020E0502060401010101" pitchFamily="34" charset="-79"/>
+                <a:ea typeface="Calibri" panose="020F0502020204030204" pitchFamily="34" charset="0"/>
+                <a:cs typeface="David" panose="020E0502060401010101" pitchFamily="34" charset="-79"/>
+              </a:rPr>
+              <a:t>)</a:t>
+            </a:r>
+            <a:r>
+              <a:rPr lang="he-IL">
+                <a:solidFill>
+                  <a:srgbClr val="00B050"/>
+                </a:solidFill>
+                <a:effectLst/>
+                <a:latin typeface="David" panose="020E0502060401010101" pitchFamily="34" charset="-79"/>
+                <a:ea typeface="Calibri" panose="020F0502020204030204" pitchFamily="34" charset="0"/>
+                <a:cs typeface="David" panose="020E0502060401010101" pitchFamily="34" charset="-79"/>
+              </a:rPr>
+              <a:t>, ולכן נשאר להם ביחד לפחות 1. לכן הם יכולים לממן מועמד נוסף.</a:t>
             </a:r>
             <a:r>
               <a:rPr lang="he-IL">
@@ -6168,7 +6548,7 @@
 </p:sld>
 </file>
 
-<file path=ppt/slides/slide18.xml><?xml version="1.0" encoding="utf-8"?>
+<file path=ppt/slides/slide19.xml><?xml version="1.0" encoding="utf-8"?>
 <p:sld xmlns:a="http://schemas.openxmlformats.org/drawingml/2006/main" xmlns:r="http://schemas.openxmlformats.org/officeDocument/2006/relationships" xmlns:p="http://schemas.openxmlformats.org/presentationml/2006/main">
   <p:cSld>
     <p:spTree>
@@ -6555,506 +6935,6 @@
   <p:clrMapOvr>
     <a:masterClrMapping/>
   </p:clrMapOvr>
-</p:sld>
-</file>
-
-<file path=ppt/slides/slide19.xml><?xml version="1.0" encoding="utf-8"?>
-<p:sld xmlns:a="http://schemas.openxmlformats.org/drawingml/2006/main" xmlns:r="http://schemas.openxmlformats.org/officeDocument/2006/relationships" xmlns:p="http://schemas.openxmlformats.org/presentationml/2006/main">
-  <p:cSld>
-    <p:spTree>
-      <p:nvGrpSpPr>
-        <p:cNvPr id="1" name="">
-          <a:extLst>
-            <a:ext uri="{FF2B5EF4-FFF2-40B4-BE49-F238E27FC236}">
-              <a16:creationId xmlns:a16="http://schemas.microsoft.com/office/drawing/2014/main" id="{2CCEA52A-DDB7-07DE-3991-62563CCF2D32}"/>
-            </a:ext>
-          </a:extLst>
-        </p:cNvPr>
-        <p:cNvGrpSpPr/>
-        <p:nvPr/>
-      </p:nvGrpSpPr>
-      <p:grpSpPr>
-        <a:xfrm>
-          <a:off x="0" y="0"/>
-          <a:ext cx="0" cy="0"/>
-          <a:chOff x="0" y="0"/>
-          <a:chExt cx="0" cy="0"/>
-        </a:xfrm>
-      </p:grpSpPr>
-      <p:sp>
-        <p:nvSpPr>
-          <p:cNvPr id="2" name="Title 1">
-            <a:extLst>
-              <a:ext uri="{FF2B5EF4-FFF2-40B4-BE49-F238E27FC236}">
-                <a16:creationId xmlns:a16="http://schemas.microsoft.com/office/drawing/2014/main" id="{DDEF5961-B6E1-9F7A-CBAD-70E802026BF4}"/>
-              </a:ext>
-            </a:extLst>
-          </p:cNvPr>
-          <p:cNvSpPr>
-            <a:spLocks noGrp="1"/>
-          </p:cNvSpPr>
-          <p:nvPr>
-            <p:ph type="title"/>
-          </p:nvPr>
-        </p:nvSpPr>
-        <p:spPr/>
-        <p:txBody>
-          <a:bodyPr/>
-          <a:lstStyle/>
-          <a:p>
-            <a:pPr algn="ctr" rtl="1"/>
-            <a:r>
-              <a:rPr lang="he-IL"/>
-              <a:t>מבחירת ועדה לחלוקת תקציב</a:t>
-            </a:r>
-            <a:endParaRPr lang="en-US"/>
-          </a:p>
-        </p:txBody>
-      </p:sp>
-      <p:sp>
-        <p:nvSpPr>
-          <p:cNvPr id="3" name="Content Placeholder 2">
-            <a:extLst>
-              <a:ext uri="{FF2B5EF4-FFF2-40B4-BE49-F238E27FC236}">
-                <a16:creationId xmlns:a16="http://schemas.microsoft.com/office/drawing/2014/main" id="{0D28FC16-143F-463D-8BFB-F5F8E89276B5}"/>
-              </a:ext>
-            </a:extLst>
-          </p:cNvPr>
-          <p:cNvSpPr>
-            <a:spLocks noGrp="1"/>
-          </p:cNvSpPr>
-          <p:nvPr>
-            <p:ph idx="1"/>
-          </p:nvPr>
-        </p:nvSpPr>
-        <p:spPr>
-          <a:xfrm>
-            <a:off x="358666" y="1502432"/>
-            <a:ext cx="8529144" cy="3935842"/>
-          </a:xfrm>
-        </p:spPr>
-        <p:txBody>
-          <a:bodyPr>
-            <a:noAutofit/>
-          </a:bodyPr>
-          <a:lstStyle/>
-          <a:p>
-            <a:pPr marL="0" indent="0" algn="r" rtl="1">
-              <a:buNone/>
-            </a:pPr>
-            <a:r>
-              <a:rPr lang="he-IL">
-                <a:solidFill>
-                  <a:srgbClr val="0070C0"/>
-                </a:solidFill>
-              </a:rPr>
-              <a:t>נכליל את שיטת החלקים השווים:</a:t>
-            </a:r>
-          </a:p>
-          <a:p>
-            <a:pPr algn="r" rtl="1"/>
-            <a:r>
-              <a:rPr lang="he-IL">
-                <a:solidFill>
-                  <a:srgbClr val="0070C0"/>
-                </a:solidFill>
-              </a:rPr>
-              <a:t>במקום המועמדים, יהיו </a:t>
-            </a:r>
-            <a:r>
-              <a:rPr lang="he-IL" b="1">
-                <a:solidFill>
-                  <a:srgbClr val="0070C0"/>
-                </a:solidFill>
-              </a:rPr>
-              <a:t>הפריטים</a:t>
-            </a:r>
-            <a:r>
-              <a:rPr lang="he-IL">
-                <a:solidFill>
-                  <a:srgbClr val="0070C0"/>
-                </a:solidFill>
-              </a:rPr>
-              <a:t> האפשריים בתקציב;</a:t>
-            </a:r>
-          </a:p>
-          <a:p>
-            <a:pPr algn="r" rtl="1"/>
-            <a:r>
-              <a:rPr lang="he-IL">
-                <a:solidFill>
-                  <a:srgbClr val="0070C0"/>
-                </a:solidFill>
-              </a:rPr>
-              <a:t>במקום עלות של 1 לכל מועמד, תהיה </a:t>
-            </a:r>
-            <a:r>
-              <a:rPr lang="he-IL" b="1">
-                <a:solidFill>
-                  <a:srgbClr val="0070C0"/>
-                </a:solidFill>
-              </a:rPr>
-              <a:t>העלות האמיתית </a:t>
-            </a:r>
-            <a:r>
-              <a:rPr lang="he-IL">
-                <a:solidFill>
-                  <a:srgbClr val="0070C0"/>
-                </a:solidFill>
-              </a:rPr>
-              <a:t>של כל פריט בשקלים.</a:t>
-            </a:r>
-          </a:p>
-          <a:p>
-            <a:pPr algn="r" rtl="1"/>
-            <a:r>
-              <a:rPr lang="he-IL">
-                <a:solidFill>
-                  <a:srgbClr val="0070C0"/>
-                </a:solidFill>
-              </a:rPr>
-              <a:t>התקציב הוירטואלי ההתחלתי של כל אזרח יהיה </a:t>
-            </a:r>
-            <a:r>
-              <a:rPr lang="en-US" b="1">
-                <a:solidFill>
-                  <a:srgbClr val="0070C0"/>
-                </a:solidFill>
-              </a:rPr>
-              <a:t>B/n</a:t>
-            </a:r>
-            <a:r>
-              <a:rPr lang="he-IL">
-                <a:solidFill>
-                  <a:srgbClr val="0070C0"/>
-                </a:solidFill>
-              </a:rPr>
-              <a:t>, כאשר </a:t>
-            </a:r>
-            <a:r>
-              <a:rPr lang="en-US">
-                <a:solidFill>
-                  <a:srgbClr val="0070C0"/>
-                </a:solidFill>
-              </a:rPr>
-              <a:t>B</a:t>
-            </a:r>
-            <a:r>
-              <a:rPr lang="he-IL">
-                <a:solidFill>
-                  <a:srgbClr val="0070C0"/>
-                </a:solidFill>
-              </a:rPr>
-              <a:t> = התקציב הכולל.</a:t>
-            </a:r>
-          </a:p>
-          <a:p>
-            <a:pPr algn="r" rtl="1"/>
-            <a:endParaRPr lang="he-IL"/>
-          </a:p>
-          <a:p>
-            <a:pPr marL="0" indent="0" algn="r" rtl="1">
-              <a:buNone/>
-            </a:pPr>
-            <a:r>
-              <a:rPr lang="he-IL">
-                <a:solidFill>
-                  <a:srgbClr val="00B050"/>
-                </a:solidFill>
-              </a:rPr>
-              <a:t>באופן דומה אפשר להכליל את שיטת פראגמן.</a:t>
-            </a:r>
-          </a:p>
-        </p:txBody>
-      </p:sp>
-    </p:spTree>
-    <p:extLst>
-      <p:ext uri="{BB962C8B-B14F-4D97-AF65-F5344CB8AC3E}">
-        <p14:creationId xmlns:p14="http://schemas.microsoft.com/office/powerpoint/2010/main" val="1622601011"/>
-      </p:ext>
-    </p:extLst>
-  </p:cSld>
-  <p:clrMapOvr>
-    <a:masterClrMapping/>
-  </p:clrMapOvr>
-  <p:timing>
-    <p:tnLst>
-      <p:par>
-        <p:cTn id="1" dur="indefinite" restart="never" nodeType="tmRoot">
-          <p:childTnLst>
-            <p:seq concurrent="1" nextAc="seek">
-              <p:cTn id="2" dur="indefinite" nodeType="mainSeq">
-                <p:childTnLst>
-                  <p:par>
-                    <p:cTn id="3" fill="hold">
-                      <p:stCondLst>
-                        <p:cond delay="indefinite"/>
-                      </p:stCondLst>
-                      <p:childTnLst>
-                        <p:par>
-                          <p:cTn id="4" fill="hold">
-                            <p:stCondLst>
-                              <p:cond delay="0"/>
-                            </p:stCondLst>
-                            <p:childTnLst>
-                              <p:par>
-                                <p:cTn id="5" presetID="1" presetClass="entr" presetSubtype="0" fill="hold" grpId="0" nodeType="clickEffect">
-                                  <p:stCondLst>
-                                    <p:cond delay="0"/>
-                                  </p:stCondLst>
-                                  <p:childTnLst>
-                                    <p:set>
-                                      <p:cBhvr>
-                                        <p:cTn id="6" dur="1" fill="hold">
-                                          <p:stCondLst>
-                                            <p:cond delay="0"/>
-                                          </p:stCondLst>
-                                        </p:cTn>
-                                        <p:tgtEl>
-                                          <p:spTgt spid="3">
-                                            <p:txEl>
-                                              <p:pRg st="0" end="0"/>
-                                            </p:txEl>
-                                          </p:spTgt>
-                                        </p:tgtEl>
-                                        <p:attrNameLst>
-                                          <p:attrName>style.visibility</p:attrName>
-                                        </p:attrNameLst>
-                                      </p:cBhvr>
-                                      <p:to>
-                                        <p:strVal val="visible"/>
-                                      </p:to>
-                                    </p:set>
-                                  </p:childTnLst>
-                                </p:cTn>
-                              </p:par>
-                            </p:childTnLst>
-                          </p:cTn>
-                        </p:par>
-                      </p:childTnLst>
-                    </p:cTn>
-                  </p:par>
-                  <p:par>
-                    <p:cTn id="7" fill="hold">
-                      <p:stCondLst>
-                        <p:cond delay="indefinite"/>
-                      </p:stCondLst>
-                      <p:childTnLst>
-                        <p:par>
-                          <p:cTn id="8" fill="hold">
-                            <p:stCondLst>
-                              <p:cond delay="0"/>
-                            </p:stCondLst>
-                            <p:childTnLst>
-                              <p:par>
-                                <p:cTn id="9" presetID="1" presetClass="entr" presetSubtype="0" fill="hold" grpId="0" nodeType="clickEffect">
-                                  <p:stCondLst>
-                                    <p:cond delay="0"/>
-                                  </p:stCondLst>
-                                  <p:childTnLst>
-                                    <p:set>
-                                      <p:cBhvr>
-                                        <p:cTn id="10" dur="1" fill="hold">
-                                          <p:stCondLst>
-                                            <p:cond delay="0"/>
-                                          </p:stCondLst>
-                                        </p:cTn>
-                                        <p:tgtEl>
-                                          <p:spTgt spid="3">
-                                            <p:txEl>
-                                              <p:pRg st="1" end="1"/>
-                                            </p:txEl>
-                                          </p:spTgt>
-                                        </p:tgtEl>
-                                        <p:attrNameLst>
-                                          <p:attrName>style.visibility</p:attrName>
-                                        </p:attrNameLst>
-                                      </p:cBhvr>
-                                      <p:to>
-                                        <p:strVal val="visible"/>
-                                      </p:to>
-                                    </p:set>
-                                  </p:childTnLst>
-                                </p:cTn>
-                              </p:par>
-                            </p:childTnLst>
-                          </p:cTn>
-                        </p:par>
-                      </p:childTnLst>
-                    </p:cTn>
-                  </p:par>
-                  <p:par>
-                    <p:cTn id="11" fill="hold">
-                      <p:stCondLst>
-                        <p:cond delay="indefinite"/>
-                      </p:stCondLst>
-                      <p:childTnLst>
-                        <p:par>
-                          <p:cTn id="12" fill="hold">
-                            <p:stCondLst>
-                              <p:cond delay="0"/>
-                            </p:stCondLst>
-                            <p:childTnLst>
-                              <p:par>
-                                <p:cTn id="13" presetID="1" presetClass="entr" presetSubtype="0" fill="hold" grpId="0" nodeType="clickEffect">
-                                  <p:stCondLst>
-                                    <p:cond delay="0"/>
-                                  </p:stCondLst>
-                                  <p:childTnLst>
-                                    <p:set>
-                                      <p:cBhvr>
-                                        <p:cTn id="14" dur="1" fill="hold">
-                                          <p:stCondLst>
-                                            <p:cond delay="0"/>
-                                          </p:stCondLst>
-                                        </p:cTn>
-                                        <p:tgtEl>
-                                          <p:spTgt spid="3">
-                                            <p:txEl>
-                                              <p:pRg st="2" end="2"/>
-                                            </p:txEl>
-                                          </p:spTgt>
-                                        </p:tgtEl>
-                                        <p:attrNameLst>
-                                          <p:attrName>style.visibility</p:attrName>
-                                        </p:attrNameLst>
-                                      </p:cBhvr>
-                                      <p:to>
-                                        <p:strVal val="visible"/>
-                                      </p:to>
-                                    </p:set>
-                                  </p:childTnLst>
-                                </p:cTn>
-                              </p:par>
-                            </p:childTnLst>
-                          </p:cTn>
-                        </p:par>
-                      </p:childTnLst>
-                    </p:cTn>
-                  </p:par>
-                  <p:par>
-                    <p:cTn id="15" fill="hold">
-                      <p:stCondLst>
-                        <p:cond delay="indefinite"/>
-                      </p:stCondLst>
-                      <p:childTnLst>
-                        <p:par>
-                          <p:cTn id="16" fill="hold">
-                            <p:stCondLst>
-                              <p:cond delay="0"/>
-                            </p:stCondLst>
-                            <p:childTnLst>
-                              <p:par>
-                                <p:cTn id="17" presetID="1" presetClass="entr" presetSubtype="0" fill="hold" grpId="0" nodeType="clickEffect">
-                                  <p:stCondLst>
-                                    <p:cond delay="0"/>
-                                  </p:stCondLst>
-                                  <p:childTnLst>
-                                    <p:set>
-                                      <p:cBhvr>
-                                        <p:cTn id="18" dur="1" fill="hold">
-                                          <p:stCondLst>
-                                            <p:cond delay="0"/>
-                                          </p:stCondLst>
-                                        </p:cTn>
-                                        <p:tgtEl>
-                                          <p:spTgt spid="3">
-                                            <p:txEl>
-                                              <p:pRg st="3" end="3"/>
-                                            </p:txEl>
-                                          </p:spTgt>
-                                        </p:tgtEl>
-                                        <p:attrNameLst>
-                                          <p:attrName>style.visibility</p:attrName>
-                                        </p:attrNameLst>
-                                      </p:cBhvr>
-                                      <p:to>
-                                        <p:strVal val="visible"/>
-                                      </p:to>
-                                    </p:set>
-                                  </p:childTnLst>
-                                </p:cTn>
-                              </p:par>
-                            </p:childTnLst>
-                          </p:cTn>
-                        </p:par>
-                      </p:childTnLst>
-                    </p:cTn>
-                  </p:par>
-                  <p:par>
-                    <p:cTn id="19" fill="hold">
-                      <p:stCondLst>
-                        <p:cond delay="indefinite"/>
-                      </p:stCondLst>
-                      <p:childTnLst>
-                        <p:par>
-                          <p:cTn id="20" fill="hold">
-                            <p:stCondLst>
-                              <p:cond delay="0"/>
-                            </p:stCondLst>
-                            <p:childTnLst>
-                              <p:par>
-                                <p:cTn id="21" presetID="1" presetClass="entr" presetSubtype="0" fill="hold" grpId="0" nodeType="clickEffect">
-                                  <p:stCondLst>
-                                    <p:cond delay="0"/>
-                                  </p:stCondLst>
-                                  <p:childTnLst>
-                                    <p:set>
-                                      <p:cBhvr>
-                                        <p:cTn id="22" dur="1" fill="hold">
-                                          <p:stCondLst>
-                                            <p:cond delay="0"/>
-                                          </p:stCondLst>
-                                        </p:cTn>
-                                        <p:tgtEl>
-                                          <p:spTgt spid="3">
-                                            <p:txEl>
-                                              <p:pRg st="5" end="5"/>
-                                            </p:txEl>
-                                          </p:spTgt>
-                                        </p:tgtEl>
-                                        <p:attrNameLst>
-                                          <p:attrName>style.visibility</p:attrName>
-                                        </p:attrNameLst>
-                                      </p:cBhvr>
-                                      <p:to>
-                                        <p:strVal val="visible"/>
-                                      </p:to>
-                                    </p:set>
-                                  </p:childTnLst>
-                                </p:cTn>
-                              </p:par>
-                            </p:childTnLst>
-                          </p:cTn>
-                        </p:par>
-                      </p:childTnLst>
-                    </p:cTn>
-                  </p:par>
-                </p:childTnLst>
-              </p:cTn>
-              <p:prevCondLst>
-                <p:cond evt="onPrev" delay="0">
-                  <p:tgtEl>
-                    <p:sldTgt/>
-                  </p:tgtEl>
-                </p:cond>
-              </p:prevCondLst>
-              <p:nextCondLst>
-                <p:cond evt="onNext" delay="0">
-                  <p:tgtEl>
-                    <p:sldTgt/>
-                  </p:tgtEl>
-                </p:cond>
-              </p:nextCondLst>
-            </p:seq>
-          </p:childTnLst>
-        </p:cTn>
-      </p:par>
-    </p:tnLst>
-    <p:bldLst>
-      <p:bldP spid="3" grpId="0" uiExpand="1" build="p"/>
-    </p:bldLst>
-  </p:timing>
 </p:sld>
 </file>
 
@@ -7692,6 +7572,506 @@
 </file>
 
 <file path=ppt/slides/slide20.xml><?xml version="1.0" encoding="utf-8"?>
+<p:sld xmlns:a="http://schemas.openxmlformats.org/drawingml/2006/main" xmlns:r="http://schemas.openxmlformats.org/officeDocument/2006/relationships" xmlns:p="http://schemas.openxmlformats.org/presentationml/2006/main">
+  <p:cSld>
+    <p:spTree>
+      <p:nvGrpSpPr>
+        <p:cNvPr id="1" name="">
+          <a:extLst>
+            <a:ext uri="{FF2B5EF4-FFF2-40B4-BE49-F238E27FC236}">
+              <a16:creationId xmlns:a16="http://schemas.microsoft.com/office/drawing/2014/main" id="{2CCEA52A-DDB7-07DE-3991-62563CCF2D32}"/>
+            </a:ext>
+          </a:extLst>
+        </p:cNvPr>
+        <p:cNvGrpSpPr/>
+        <p:nvPr/>
+      </p:nvGrpSpPr>
+      <p:grpSpPr>
+        <a:xfrm>
+          <a:off x="0" y="0"/>
+          <a:ext cx="0" cy="0"/>
+          <a:chOff x="0" y="0"/>
+          <a:chExt cx="0" cy="0"/>
+        </a:xfrm>
+      </p:grpSpPr>
+      <p:sp>
+        <p:nvSpPr>
+          <p:cNvPr id="2" name="Title 1">
+            <a:extLst>
+              <a:ext uri="{FF2B5EF4-FFF2-40B4-BE49-F238E27FC236}">
+                <a16:creationId xmlns:a16="http://schemas.microsoft.com/office/drawing/2014/main" id="{DDEF5961-B6E1-9F7A-CBAD-70E802026BF4}"/>
+              </a:ext>
+            </a:extLst>
+          </p:cNvPr>
+          <p:cNvSpPr>
+            <a:spLocks noGrp="1"/>
+          </p:cNvSpPr>
+          <p:nvPr>
+            <p:ph type="title"/>
+          </p:nvPr>
+        </p:nvSpPr>
+        <p:spPr/>
+        <p:txBody>
+          <a:bodyPr/>
+          <a:lstStyle/>
+          <a:p>
+            <a:pPr algn="ctr" rtl="1"/>
+            <a:r>
+              <a:rPr lang="he-IL"/>
+              <a:t>מבחירת ועדה לחלוקת תקציב</a:t>
+            </a:r>
+            <a:endParaRPr lang="en-US"/>
+          </a:p>
+        </p:txBody>
+      </p:sp>
+      <p:sp>
+        <p:nvSpPr>
+          <p:cNvPr id="3" name="Content Placeholder 2">
+            <a:extLst>
+              <a:ext uri="{FF2B5EF4-FFF2-40B4-BE49-F238E27FC236}">
+                <a16:creationId xmlns:a16="http://schemas.microsoft.com/office/drawing/2014/main" id="{0D28FC16-143F-463D-8BFB-F5F8E89276B5}"/>
+              </a:ext>
+            </a:extLst>
+          </p:cNvPr>
+          <p:cNvSpPr>
+            <a:spLocks noGrp="1"/>
+          </p:cNvSpPr>
+          <p:nvPr>
+            <p:ph idx="1"/>
+          </p:nvPr>
+        </p:nvSpPr>
+        <p:spPr>
+          <a:xfrm>
+            <a:off x="358666" y="1502432"/>
+            <a:ext cx="8529144" cy="3935842"/>
+          </a:xfrm>
+        </p:spPr>
+        <p:txBody>
+          <a:bodyPr>
+            <a:noAutofit/>
+          </a:bodyPr>
+          <a:lstStyle/>
+          <a:p>
+            <a:pPr marL="0" indent="0" algn="r" rtl="1">
+              <a:buNone/>
+            </a:pPr>
+            <a:r>
+              <a:rPr lang="he-IL">
+                <a:solidFill>
+                  <a:srgbClr val="0070C0"/>
+                </a:solidFill>
+              </a:rPr>
+              <a:t>נכליל את שיטת החלקים השווים:</a:t>
+            </a:r>
+          </a:p>
+          <a:p>
+            <a:pPr algn="r" rtl="1"/>
+            <a:r>
+              <a:rPr lang="he-IL">
+                <a:solidFill>
+                  <a:srgbClr val="0070C0"/>
+                </a:solidFill>
+              </a:rPr>
+              <a:t>במקום המועמדים, יהיו </a:t>
+            </a:r>
+            <a:r>
+              <a:rPr lang="he-IL" b="1">
+                <a:solidFill>
+                  <a:srgbClr val="0070C0"/>
+                </a:solidFill>
+              </a:rPr>
+              <a:t>הפריטים</a:t>
+            </a:r>
+            <a:r>
+              <a:rPr lang="he-IL">
+                <a:solidFill>
+                  <a:srgbClr val="0070C0"/>
+                </a:solidFill>
+              </a:rPr>
+              <a:t> האפשריים בתקציב;</a:t>
+            </a:r>
+          </a:p>
+          <a:p>
+            <a:pPr algn="r" rtl="1"/>
+            <a:r>
+              <a:rPr lang="he-IL">
+                <a:solidFill>
+                  <a:srgbClr val="0070C0"/>
+                </a:solidFill>
+              </a:rPr>
+              <a:t>במקום עלות של 1 לכל מועמד, תהיה </a:t>
+            </a:r>
+            <a:r>
+              <a:rPr lang="he-IL" b="1">
+                <a:solidFill>
+                  <a:srgbClr val="0070C0"/>
+                </a:solidFill>
+              </a:rPr>
+              <a:t>העלות האמיתית </a:t>
+            </a:r>
+            <a:r>
+              <a:rPr lang="he-IL">
+                <a:solidFill>
+                  <a:srgbClr val="0070C0"/>
+                </a:solidFill>
+              </a:rPr>
+              <a:t>של כל פריט בשקלים.</a:t>
+            </a:r>
+          </a:p>
+          <a:p>
+            <a:pPr algn="r" rtl="1"/>
+            <a:r>
+              <a:rPr lang="he-IL">
+                <a:solidFill>
+                  <a:srgbClr val="0070C0"/>
+                </a:solidFill>
+              </a:rPr>
+              <a:t>התקציב הוירטואלי ההתחלתי של כל אזרח יהיה </a:t>
+            </a:r>
+            <a:r>
+              <a:rPr lang="en-US" b="1">
+                <a:solidFill>
+                  <a:srgbClr val="0070C0"/>
+                </a:solidFill>
+              </a:rPr>
+              <a:t>B/n</a:t>
+            </a:r>
+            <a:r>
+              <a:rPr lang="he-IL">
+                <a:solidFill>
+                  <a:srgbClr val="0070C0"/>
+                </a:solidFill>
+              </a:rPr>
+              <a:t>, כאשר </a:t>
+            </a:r>
+            <a:r>
+              <a:rPr lang="en-US">
+                <a:solidFill>
+                  <a:srgbClr val="0070C0"/>
+                </a:solidFill>
+              </a:rPr>
+              <a:t>B</a:t>
+            </a:r>
+            <a:r>
+              <a:rPr lang="he-IL">
+                <a:solidFill>
+                  <a:srgbClr val="0070C0"/>
+                </a:solidFill>
+              </a:rPr>
+              <a:t> = התקציב הכולל.</a:t>
+            </a:r>
+          </a:p>
+          <a:p>
+            <a:pPr algn="r" rtl="1"/>
+            <a:endParaRPr lang="he-IL"/>
+          </a:p>
+          <a:p>
+            <a:pPr marL="0" indent="0" algn="r" rtl="1">
+              <a:buNone/>
+            </a:pPr>
+            <a:r>
+              <a:rPr lang="he-IL">
+                <a:solidFill>
+                  <a:srgbClr val="00B050"/>
+                </a:solidFill>
+              </a:rPr>
+              <a:t>באופן דומה אפשר להכליל את שיטת פראגמן.</a:t>
+            </a:r>
+          </a:p>
+        </p:txBody>
+      </p:sp>
+    </p:spTree>
+    <p:extLst>
+      <p:ext uri="{BB962C8B-B14F-4D97-AF65-F5344CB8AC3E}">
+        <p14:creationId xmlns:p14="http://schemas.microsoft.com/office/powerpoint/2010/main" val="1622601011"/>
+      </p:ext>
+    </p:extLst>
+  </p:cSld>
+  <p:clrMapOvr>
+    <a:masterClrMapping/>
+  </p:clrMapOvr>
+  <p:timing>
+    <p:tnLst>
+      <p:par>
+        <p:cTn id="1" dur="indefinite" restart="never" nodeType="tmRoot">
+          <p:childTnLst>
+            <p:seq concurrent="1" nextAc="seek">
+              <p:cTn id="2" dur="indefinite" nodeType="mainSeq">
+                <p:childTnLst>
+                  <p:par>
+                    <p:cTn id="3" fill="hold">
+                      <p:stCondLst>
+                        <p:cond delay="indefinite"/>
+                      </p:stCondLst>
+                      <p:childTnLst>
+                        <p:par>
+                          <p:cTn id="4" fill="hold">
+                            <p:stCondLst>
+                              <p:cond delay="0"/>
+                            </p:stCondLst>
+                            <p:childTnLst>
+                              <p:par>
+                                <p:cTn id="5" presetID="1" presetClass="entr" presetSubtype="0" fill="hold" grpId="0" nodeType="clickEffect">
+                                  <p:stCondLst>
+                                    <p:cond delay="0"/>
+                                  </p:stCondLst>
+                                  <p:childTnLst>
+                                    <p:set>
+                                      <p:cBhvr>
+                                        <p:cTn id="6" dur="1" fill="hold">
+                                          <p:stCondLst>
+                                            <p:cond delay="0"/>
+                                          </p:stCondLst>
+                                        </p:cTn>
+                                        <p:tgtEl>
+                                          <p:spTgt spid="3">
+                                            <p:txEl>
+                                              <p:pRg st="0" end="0"/>
+                                            </p:txEl>
+                                          </p:spTgt>
+                                        </p:tgtEl>
+                                        <p:attrNameLst>
+                                          <p:attrName>style.visibility</p:attrName>
+                                        </p:attrNameLst>
+                                      </p:cBhvr>
+                                      <p:to>
+                                        <p:strVal val="visible"/>
+                                      </p:to>
+                                    </p:set>
+                                  </p:childTnLst>
+                                </p:cTn>
+                              </p:par>
+                            </p:childTnLst>
+                          </p:cTn>
+                        </p:par>
+                      </p:childTnLst>
+                    </p:cTn>
+                  </p:par>
+                  <p:par>
+                    <p:cTn id="7" fill="hold">
+                      <p:stCondLst>
+                        <p:cond delay="indefinite"/>
+                      </p:stCondLst>
+                      <p:childTnLst>
+                        <p:par>
+                          <p:cTn id="8" fill="hold">
+                            <p:stCondLst>
+                              <p:cond delay="0"/>
+                            </p:stCondLst>
+                            <p:childTnLst>
+                              <p:par>
+                                <p:cTn id="9" presetID="1" presetClass="entr" presetSubtype="0" fill="hold" grpId="0" nodeType="clickEffect">
+                                  <p:stCondLst>
+                                    <p:cond delay="0"/>
+                                  </p:stCondLst>
+                                  <p:childTnLst>
+                                    <p:set>
+                                      <p:cBhvr>
+                                        <p:cTn id="10" dur="1" fill="hold">
+                                          <p:stCondLst>
+                                            <p:cond delay="0"/>
+                                          </p:stCondLst>
+                                        </p:cTn>
+                                        <p:tgtEl>
+                                          <p:spTgt spid="3">
+                                            <p:txEl>
+                                              <p:pRg st="1" end="1"/>
+                                            </p:txEl>
+                                          </p:spTgt>
+                                        </p:tgtEl>
+                                        <p:attrNameLst>
+                                          <p:attrName>style.visibility</p:attrName>
+                                        </p:attrNameLst>
+                                      </p:cBhvr>
+                                      <p:to>
+                                        <p:strVal val="visible"/>
+                                      </p:to>
+                                    </p:set>
+                                  </p:childTnLst>
+                                </p:cTn>
+                              </p:par>
+                            </p:childTnLst>
+                          </p:cTn>
+                        </p:par>
+                      </p:childTnLst>
+                    </p:cTn>
+                  </p:par>
+                  <p:par>
+                    <p:cTn id="11" fill="hold">
+                      <p:stCondLst>
+                        <p:cond delay="indefinite"/>
+                      </p:stCondLst>
+                      <p:childTnLst>
+                        <p:par>
+                          <p:cTn id="12" fill="hold">
+                            <p:stCondLst>
+                              <p:cond delay="0"/>
+                            </p:stCondLst>
+                            <p:childTnLst>
+                              <p:par>
+                                <p:cTn id="13" presetID="1" presetClass="entr" presetSubtype="0" fill="hold" grpId="0" nodeType="clickEffect">
+                                  <p:stCondLst>
+                                    <p:cond delay="0"/>
+                                  </p:stCondLst>
+                                  <p:childTnLst>
+                                    <p:set>
+                                      <p:cBhvr>
+                                        <p:cTn id="14" dur="1" fill="hold">
+                                          <p:stCondLst>
+                                            <p:cond delay="0"/>
+                                          </p:stCondLst>
+                                        </p:cTn>
+                                        <p:tgtEl>
+                                          <p:spTgt spid="3">
+                                            <p:txEl>
+                                              <p:pRg st="2" end="2"/>
+                                            </p:txEl>
+                                          </p:spTgt>
+                                        </p:tgtEl>
+                                        <p:attrNameLst>
+                                          <p:attrName>style.visibility</p:attrName>
+                                        </p:attrNameLst>
+                                      </p:cBhvr>
+                                      <p:to>
+                                        <p:strVal val="visible"/>
+                                      </p:to>
+                                    </p:set>
+                                  </p:childTnLst>
+                                </p:cTn>
+                              </p:par>
+                            </p:childTnLst>
+                          </p:cTn>
+                        </p:par>
+                      </p:childTnLst>
+                    </p:cTn>
+                  </p:par>
+                  <p:par>
+                    <p:cTn id="15" fill="hold">
+                      <p:stCondLst>
+                        <p:cond delay="indefinite"/>
+                      </p:stCondLst>
+                      <p:childTnLst>
+                        <p:par>
+                          <p:cTn id="16" fill="hold">
+                            <p:stCondLst>
+                              <p:cond delay="0"/>
+                            </p:stCondLst>
+                            <p:childTnLst>
+                              <p:par>
+                                <p:cTn id="17" presetID="1" presetClass="entr" presetSubtype="0" fill="hold" grpId="0" nodeType="clickEffect">
+                                  <p:stCondLst>
+                                    <p:cond delay="0"/>
+                                  </p:stCondLst>
+                                  <p:childTnLst>
+                                    <p:set>
+                                      <p:cBhvr>
+                                        <p:cTn id="18" dur="1" fill="hold">
+                                          <p:stCondLst>
+                                            <p:cond delay="0"/>
+                                          </p:stCondLst>
+                                        </p:cTn>
+                                        <p:tgtEl>
+                                          <p:spTgt spid="3">
+                                            <p:txEl>
+                                              <p:pRg st="3" end="3"/>
+                                            </p:txEl>
+                                          </p:spTgt>
+                                        </p:tgtEl>
+                                        <p:attrNameLst>
+                                          <p:attrName>style.visibility</p:attrName>
+                                        </p:attrNameLst>
+                                      </p:cBhvr>
+                                      <p:to>
+                                        <p:strVal val="visible"/>
+                                      </p:to>
+                                    </p:set>
+                                  </p:childTnLst>
+                                </p:cTn>
+                              </p:par>
+                            </p:childTnLst>
+                          </p:cTn>
+                        </p:par>
+                      </p:childTnLst>
+                    </p:cTn>
+                  </p:par>
+                  <p:par>
+                    <p:cTn id="19" fill="hold">
+                      <p:stCondLst>
+                        <p:cond delay="indefinite"/>
+                      </p:stCondLst>
+                      <p:childTnLst>
+                        <p:par>
+                          <p:cTn id="20" fill="hold">
+                            <p:stCondLst>
+                              <p:cond delay="0"/>
+                            </p:stCondLst>
+                            <p:childTnLst>
+                              <p:par>
+                                <p:cTn id="21" presetID="1" presetClass="entr" presetSubtype="0" fill="hold" grpId="0" nodeType="clickEffect">
+                                  <p:stCondLst>
+                                    <p:cond delay="0"/>
+                                  </p:stCondLst>
+                                  <p:childTnLst>
+                                    <p:set>
+                                      <p:cBhvr>
+                                        <p:cTn id="22" dur="1" fill="hold">
+                                          <p:stCondLst>
+                                            <p:cond delay="0"/>
+                                          </p:stCondLst>
+                                        </p:cTn>
+                                        <p:tgtEl>
+                                          <p:spTgt spid="3">
+                                            <p:txEl>
+                                              <p:pRg st="5" end="5"/>
+                                            </p:txEl>
+                                          </p:spTgt>
+                                        </p:tgtEl>
+                                        <p:attrNameLst>
+                                          <p:attrName>style.visibility</p:attrName>
+                                        </p:attrNameLst>
+                                      </p:cBhvr>
+                                      <p:to>
+                                        <p:strVal val="visible"/>
+                                      </p:to>
+                                    </p:set>
+                                  </p:childTnLst>
+                                </p:cTn>
+                              </p:par>
+                            </p:childTnLst>
+                          </p:cTn>
+                        </p:par>
+                      </p:childTnLst>
+                    </p:cTn>
+                  </p:par>
+                </p:childTnLst>
+              </p:cTn>
+              <p:prevCondLst>
+                <p:cond evt="onPrev" delay="0">
+                  <p:tgtEl>
+                    <p:sldTgt/>
+                  </p:tgtEl>
+                </p:cond>
+              </p:prevCondLst>
+              <p:nextCondLst>
+                <p:cond evt="onNext" delay="0">
+                  <p:tgtEl>
+                    <p:sldTgt/>
+                  </p:tgtEl>
+                </p:cond>
+              </p:nextCondLst>
+            </p:seq>
+          </p:childTnLst>
+        </p:cTn>
+      </p:par>
+    </p:tnLst>
+    <p:bldLst>
+      <p:bldP spid="3" grpId="0" uiExpand="1" build="p"/>
+    </p:bldLst>
+  </p:timing>
+</p:sld>
+</file>
+
+<file path=ppt/slides/slide21.xml><?xml version="1.0" encoding="utf-8"?>
 <p:sld xmlns:a="http://schemas.openxmlformats.org/drawingml/2006/main" xmlns:r="http://schemas.openxmlformats.org/officeDocument/2006/relationships" xmlns:p="http://schemas.openxmlformats.org/presentationml/2006/main">
   <p:cSld>
     <p:spTree>
